--- a/curso_es/pptx/S18.pptx
+++ b/curso_es/pptx/S18.pptx
@@ -6645,7 +6645,7 @@
                           </a:solidFill>
                           <a:latin typeface="Nunito Sans"/>
                         </a:rPr>
-                        <a:t>Ataque a la persona (ad hominem)</a:t>
+                        <a:t>Ataque a la persona</a:t>
                       </a:r>
                     </a:p>
                   </a:txBody>
@@ -6713,7 +6713,7 @@
                           </a:solidFill>
                           <a:latin typeface="Nunito Sans"/>
                         </a:rPr>
-                        <a:t>«Tú también» (tu quoque)</a:t>
+                        <a:t>«Tú también»</a:t>
                       </a:r>
                     </a:p>
                   </a:txBody>
@@ -7048,7 +7048,7 @@
                           </a:solidFill>
                           <a:latin typeface="Nunito Sans"/>
                         </a:rPr>
-                        <a:t>Apelación al miedo (ad metum)</a:t>
+                        <a:t>Apelación al miedo</a:t>
                       </a:r>
                     </a:p>
                   </a:txBody>
@@ -7116,7 +7116,7 @@
                           </a:solidFill>
                           <a:latin typeface="Nunito Sans"/>
                         </a:rPr>
-                        <a:t>Apelación a la pena (ad misericordiam)</a:t>
+                        <a:t>Apelación a la pena</a:t>
                       </a:r>
                     </a:p>
                   </a:txBody>
